--- a/classes/parte-2-criptografia-aplicada/047-cifrado-simetrico-aes-y-modos-de-operacion/clase-047-presentacion.pptx
+++ b/classes/parte-2-criptografia-aplicada/047-cifrado-simetrico-aes-y-modos-de-operacion/clase-047-presentacion.pptx
@@ -17,6 +17,9 @@
     <p:sldId id="265" r:id="rId16"/>
     <p:sldId id="266" r:id="rId17"/>
     <p:sldId id="267" r:id="rId18"/>
+    <p:sldId id="268" r:id="rId19"/>
+    <p:sldId id="269" r:id="rId20"/>
+    <p:sldId id="270" r:id="rId21"/>
   </p:sldIdLst>
   <p:sldSz cx="9144000" cy="6858000" type="screen4x3"/>
   <p:notesSz cx="6858000" cy="9144000"/>
@@ -3198,7 +3201,7 @@
                   <a:srgbClr val="0B3D2E"/>
                 </a:solidFill>
               </a:rPr>
-              <a:t>⚠️ Errores comunes</a:t>
+              <a:t>✍️ Ejercicios</a:t>
             </a:r>
           </a:p>
         </p:txBody>
@@ -3236,67 +3239,82 @@
                   <a:srgbClr val="22282E"/>
                 </a:solidFill>
               </a:rPr>
-              <a:t>•  bad decrypt en OpenSSL — Clave/IV/modo incorrectos o padding no coincide</a:t>
-            </a:r>
-          </a:p>
-          <a:p>
-            <a:pPr>
-              <a:spcAft>
-                <a:spcPts val="600"/>
-              </a:spcAft>
-            </a:pPr>
-            <a:r>
-              <a:rPr sz="1500">
-                <a:solidFill>
-                  <a:srgbClr val="22282E"/>
-                </a:solidFill>
-              </a:rPr>
-              <a:t>•  Imagen ECB revela contenido — Comportamiento esperado; nunca uses ECB en producción</a:t>
-            </a:r>
-          </a:p>
-          <a:p>
-            <a:pPr>
-              <a:spcAft>
-                <a:spcPts val="600"/>
-              </a:spcAft>
-            </a:pPr>
-            <a:r>
-              <a:rPr sz="1500">
-                <a:solidFill>
-                  <a:srgbClr val="22282E"/>
-                </a:solidFill>
-              </a:rPr>
-              <a:t>•  IV fijo o cero en CBC — Rompe la aleatoriedad; genera IV con CSPRNG por mensaje</a:t>
-            </a:r>
-          </a:p>
-          <a:p>
-            <a:pPr>
-              <a:spcAft>
-                <a:spcPts val="600"/>
-              </a:spcAft>
-            </a:pPr>
-            <a:r>
-              <a:rPr sz="1500">
-                <a:solidFill>
-                  <a:srgbClr val="22282E"/>
-                </a:solidFill>
-              </a:rPr>
-              <a:t>•  Cifrar sin autenticar (CBC solo) — Sin integridad; usa AES-GCM</a:t>
-            </a:r>
-          </a:p>
-          <a:p>
-            <a:pPr>
-              <a:spcAft>
-                <a:spcPts val="600"/>
-              </a:spcAft>
-            </a:pPr>
-            <a:r>
-              <a:rPr sz="1500">
-                <a:solidFill>
-                  <a:srgbClr val="22282E"/>
-                </a:solidFill>
-              </a:rPr>
-              <a:t>•  Reutilizar nonce en CTR — Fuga catastrófica (dos textos con el mismo keystream)</a:t>
+              <a:t>•  Explica por qué ECB revela si dos bloques de texto plano son iguales.</a:t>
+            </a:r>
+          </a:p>
+          <a:p>
+            <a:pPr>
+              <a:spcAft>
+                <a:spcPts val="600"/>
+              </a:spcAft>
+            </a:pPr>
+            <a:r>
+              <a:rPr sz="1500">
+                <a:solidFill>
+                  <a:srgbClr val="22282E"/>
+                </a:solidFill>
+              </a:rPr>
+              <a:t>•  ¿Qué ocurre si reutilizas el mismo IV en CBC para dos mensajes distintos?</a:t>
+            </a:r>
+          </a:p>
+          <a:p>
+            <a:pPr>
+              <a:spcAft>
+                <a:spcPts val="600"/>
+              </a:spcAft>
+            </a:pPr>
+            <a:r>
+              <a:rPr sz="1500">
+                <a:solidFill>
+                  <a:srgbClr val="22282E"/>
+                </a:solidFill>
+              </a:rPr>
+              <a:t>•  Implementa cifrado/descifrado AES-CTR y comprueba que E(k)⊕E(k)=texto.</a:t>
+            </a:r>
+          </a:p>
+          <a:p>
+            <a:pPr>
+              <a:spcAft>
+                <a:spcPts val="600"/>
+              </a:spcAft>
+            </a:pPr>
+            <a:r>
+              <a:rPr sz="1500">
+                <a:solidFill>
+                  <a:srgbClr val="22282E"/>
+                </a:solidFill>
+              </a:rPr>
+              <a:t>•  Mide con openssl speed aes-128-cbc el rendimiento con y sin AES-NI.</a:t>
+            </a:r>
+          </a:p>
+          <a:p>
+            <a:pPr>
+              <a:spcAft>
+                <a:spcPts val="600"/>
+              </a:spcAft>
+            </a:pPr>
+            <a:r>
+              <a:rPr sz="1500">
+                <a:solidFill>
+                  <a:srgbClr val="22282E"/>
+                </a:solidFill>
+              </a:rPr>
+              <a:t>•  Convierte una imagen BMP a ECB y documenta la fuga con capturas.</a:t>
+            </a:r>
+          </a:p>
+          <a:p>
+            <a:pPr>
+              <a:spcAft>
+                <a:spcPts val="600"/>
+              </a:spcAft>
+            </a:pPr>
+            <a:r>
+              <a:rPr sz="1500">
+                <a:solidFill>
+                  <a:srgbClr val="22282E"/>
+                </a:solidFill>
+              </a:rPr>
+              <a:t>•  Argumenta por qué CTR permite acceso aleatorio a bloques y CBC no.</a:t>
             </a:r>
           </a:p>
         </p:txBody>
@@ -3347,7 +3365,7 @@
                   <a:srgbClr val="0B3D2E"/>
                 </a:solidFill>
               </a:rPr>
-              <a:t>❓ Preguntas frecuentes</a:t>
+              <a:t>📝 Reto verificable</a:t>
             </a:r>
           </a:p>
         </p:txBody>
@@ -3385,82 +3403,7 @@
                   <a:srgbClr val="22282E"/>
                 </a:solidFill>
               </a:rPr>
-              <a:t>•  ❓ ¿AES-256 es "el doble de seguro" que AES-128?</a:t>
-            </a:r>
-          </a:p>
-          <a:p>
-            <a:pPr>
-              <a:spcAft>
-                <a:spcPts val="600"/>
-              </a:spcAft>
-            </a:pPr>
-            <a:r>
-              <a:rPr sz="1500">
-                <a:solidFill>
-                  <a:srgbClr val="22282E"/>
-                </a:solidFill>
-              </a:rPr>
-              <a:t>•  No; ambos son inquebrantables por fuerza bruta. 256 aporta margen post-cuántico, pero el modo importa mucho más que el tamaño de clave.</a:t>
-            </a:r>
-          </a:p>
-          <a:p>
-            <a:pPr>
-              <a:spcAft>
-                <a:spcPts val="600"/>
-              </a:spcAft>
-            </a:pPr>
-            <a:r>
-              <a:rPr sz="1500">
-                <a:solidFill>
-                  <a:srgbClr val="22282E"/>
-                </a:solidFill>
-              </a:rPr>
-              <a:t>•  ❓ ¿Qué modo debo usar?</a:t>
-            </a:r>
-          </a:p>
-          <a:p>
-            <a:pPr>
-              <a:spcAft>
-                <a:spcPts val="600"/>
-              </a:spcAft>
-            </a:pPr>
-            <a:r>
-              <a:rPr sz="1500">
-                <a:solidFill>
-                  <a:srgbClr val="22282E"/>
-                </a:solidFill>
-              </a:rPr>
-              <a:t>•  AES-GCM o ChaCha20-Poly1305 (AEAD). Evita ECB siempre; CBC/CTR solo con un MAC añadido y hecho correctamente.</a:t>
-            </a:r>
-          </a:p>
-          <a:p>
-            <a:pPr>
-              <a:spcAft>
-                <a:spcPts val="600"/>
-              </a:spcAft>
-            </a:pPr>
-            <a:r>
-              <a:rPr sz="1500">
-                <a:solidFill>
-                  <a:srgbClr val="22282E"/>
-                </a:solidFill>
-              </a:rPr>
-              <a:t>•  ❓ ¿El IV debe ser secreto?</a:t>
-            </a:r>
-          </a:p>
-          <a:p>
-            <a:pPr>
-              <a:spcAft>
-                <a:spcPts val="600"/>
-              </a:spcAft>
-            </a:pPr>
-            <a:r>
-              <a:rPr sz="1500">
-                <a:solidFill>
-                  <a:srgbClr val="22282E"/>
-                </a:solidFill>
-              </a:rPr>
-              <a:t>•  No, pero sí impredecible (CBC) o único (CTR/GCM). Se transmite junto al texto cifrado.</a:t>
+              <a:t>•  Escribe un script que cifre la misma imagen BMP con ECB y con CBC y genere las dos salidas visualizables. Criterio de aceptación: la versión ECB muestra claramente la silueta original y la CBC es…</a:t>
             </a:r>
           </a:p>
         </p:txBody>
@@ -3511,7 +3454,7 @@
                   <a:srgbClr val="0B3D2E"/>
                 </a:solidFill>
               </a:rPr>
-              <a:t>🔗 Referencias</a:t>
+              <a:t>⚠️ Errores comunes</a:t>
             </a:r>
           </a:p>
         </p:txBody>
@@ -3549,6 +3492,319 @@
                   <a:srgbClr val="22282E"/>
                 </a:solidFill>
               </a:rPr>
+              <a:t>•  bad decrypt en OpenSSL — Clave/IV/modo incorrectos o padding no coincide</a:t>
+            </a:r>
+          </a:p>
+          <a:p>
+            <a:pPr>
+              <a:spcAft>
+                <a:spcPts val="600"/>
+              </a:spcAft>
+            </a:pPr>
+            <a:r>
+              <a:rPr sz="1500">
+                <a:solidFill>
+                  <a:srgbClr val="22282E"/>
+                </a:solidFill>
+              </a:rPr>
+              <a:t>•  Imagen ECB revela contenido — Comportamiento esperado; nunca uses ECB en producción</a:t>
+            </a:r>
+          </a:p>
+          <a:p>
+            <a:pPr>
+              <a:spcAft>
+                <a:spcPts val="600"/>
+              </a:spcAft>
+            </a:pPr>
+            <a:r>
+              <a:rPr sz="1500">
+                <a:solidFill>
+                  <a:srgbClr val="22282E"/>
+                </a:solidFill>
+              </a:rPr>
+              <a:t>•  IV fijo o cero en CBC — Rompe la aleatoriedad; genera IV con CSPRNG por mensaje</a:t>
+            </a:r>
+          </a:p>
+          <a:p>
+            <a:pPr>
+              <a:spcAft>
+                <a:spcPts val="600"/>
+              </a:spcAft>
+            </a:pPr>
+            <a:r>
+              <a:rPr sz="1500">
+                <a:solidFill>
+                  <a:srgbClr val="22282E"/>
+                </a:solidFill>
+              </a:rPr>
+              <a:t>•  Cifrar sin autenticar (CBC solo) — Sin integridad; usa AES-GCM</a:t>
+            </a:r>
+          </a:p>
+          <a:p>
+            <a:pPr>
+              <a:spcAft>
+                <a:spcPts val="600"/>
+              </a:spcAft>
+            </a:pPr>
+            <a:r>
+              <a:rPr sz="1500">
+                <a:solidFill>
+                  <a:srgbClr val="22282E"/>
+                </a:solidFill>
+              </a:rPr>
+              <a:t>•  Reutilizar nonce en CTR — Fuga catastrófica (dos textos con el mismo keystream)</a:t>
+            </a:r>
+          </a:p>
+        </p:txBody>
+      </p:sp>
+    </p:spTree>
+  </p:cSld>
+  <p:clrMapOvr>
+    <a:masterClrMapping/>
+  </p:clrMapOvr>
+</p:sld>
+</file>
+
+<file path=ppt/slides/slide13.xml><?xml version="1.0" encoding="utf-8"?>
+<p:sld xmlns:a="http://schemas.openxmlformats.org/drawingml/2006/main" xmlns:p="http://schemas.openxmlformats.org/presentationml/2006/main" xmlns:r="http://schemas.openxmlformats.org/officeDocument/2006/relationships">
+  <p:cSld>
+    <p:spTree>
+      <p:nvGrpSpPr>
+        <p:cNvPr id="1" name=""/>
+        <p:cNvGrpSpPr/>
+        <p:nvPr/>
+      </p:nvGrpSpPr>
+      <p:grpSpPr/>
+      <p:sp>
+        <p:nvSpPr>
+          <p:cNvPr id="2" name="TextBox 1"/>
+          <p:cNvSpPr txBox="1"/>
+          <p:nvPr/>
+        </p:nvSpPr>
+        <p:spPr>
+          <a:xfrm>
+            <a:off x="457200" y="320040"/>
+            <a:ext cx="8229600" cy="822960"/>
+          </a:xfrm>
+          <a:prstGeom prst="rect">
+            <a:avLst/>
+          </a:prstGeom>
+          <a:noFill/>
+        </p:spPr>
+        <p:txBody>
+          <a:bodyPr wrap="square">
+            <a:spAutoFit/>
+          </a:bodyPr>
+          <a:lstStyle/>
+          <a:p>
+            <a:r>
+              <a:rPr sz="2600" b="1">
+                <a:solidFill>
+                  <a:srgbClr val="0B3D2E"/>
+                </a:solidFill>
+              </a:rPr>
+              <a:t>❓ Preguntas frecuentes</a:t>
+            </a:r>
+          </a:p>
+        </p:txBody>
+      </p:sp>
+      <p:sp>
+        <p:nvSpPr>
+          <p:cNvPr id="3" name="TextBox 2"/>
+          <p:cNvSpPr txBox="1"/>
+          <p:nvPr/>
+        </p:nvSpPr>
+        <p:spPr>
+          <a:xfrm>
+            <a:off x="457200" y="1280160"/>
+            <a:ext cx="8229600" cy="4937760"/>
+          </a:xfrm>
+          <a:prstGeom prst="rect">
+            <a:avLst/>
+          </a:prstGeom>
+          <a:noFill/>
+        </p:spPr>
+        <p:txBody>
+          <a:bodyPr wrap="square">
+            <a:spAutoFit/>
+          </a:bodyPr>
+          <a:lstStyle/>
+          <a:p>
+            <a:pPr>
+              <a:spcAft>
+                <a:spcPts val="600"/>
+              </a:spcAft>
+            </a:pPr>
+            <a:r>
+              <a:rPr sz="1500">
+                <a:solidFill>
+                  <a:srgbClr val="22282E"/>
+                </a:solidFill>
+              </a:rPr>
+              <a:t>•  ❓ ¿AES-256 es "el doble de seguro" que AES-128?</a:t>
+            </a:r>
+          </a:p>
+          <a:p>
+            <a:pPr>
+              <a:spcAft>
+                <a:spcPts val="600"/>
+              </a:spcAft>
+            </a:pPr>
+            <a:r>
+              <a:rPr sz="1500">
+                <a:solidFill>
+                  <a:srgbClr val="22282E"/>
+                </a:solidFill>
+              </a:rPr>
+              <a:t>•  No; ambos son inquebrantables por fuerza bruta. 256 aporta margen post-cuántico, pero el modo importa mucho más que el tamaño de clave.</a:t>
+            </a:r>
+          </a:p>
+          <a:p>
+            <a:pPr>
+              <a:spcAft>
+                <a:spcPts val="600"/>
+              </a:spcAft>
+            </a:pPr>
+            <a:r>
+              <a:rPr sz="1500">
+                <a:solidFill>
+                  <a:srgbClr val="22282E"/>
+                </a:solidFill>
+              </a:rPr>
+              <a:t>•  ❓ ¿Qué modo debo usar?</a:t>
+            </a:r>
+          </a:p>
+          <a:p>
+            <a:pPr>
+              <a:spcAft>
+                <a:spcPts val="600"/>
+              </a:spcAft>
+            </a:pPr>
+            <a:r>
+              <a:rPr sz="1500">
+                <a:solidFill>
+                  <a:srgbClr val="22282E"/>
+                </a:solidFill>
+              </a:rPr>
+              <a:t>•  AES-GCM o ChaCha20-Poly1305 (AEAD). Evita ECB siempre; CBC/CTR solo con un MAC añadido y hecho correctamente.</a:t>
+            </a:r>
+          </a:p>
+          <a:p>
+            <a:pPr>
+              <a:spcAft>
+                <a:spcPts val="600"/>
+              </a:spcAft>
+            </a:pPr>
+            <a:r>
+              <a:rPr sz="1500">
+                <a:solidFill>
+                  <a:srgbClr val="22282E"/>
+                </a:solidFill>
+              </a:rPr>
+              <a:t>•  ❓ ¿El IV debe ser secreto?</a:t>
+            </a:r>
+          </a:p>
+          <a:p>
+            <a:pPr>
+              <a:spcAft>
+                <a:spcPts val="600"/>
+              </a:spcAft>
+            </a:pPr>
+            <a:r>
+              <a:rPr sz="1500">
+                <a:solidFill>
+                  <a:srgbClr val="22282E"/>
+                </a:solidFill>
+              </a:rPr>
+              <a:t>•  No, pero sí impredecible (CBC) o único (CTR/GCM). Se transmite junto al texto cifrado.</a:t>
+            </a:r>
+          </a:p>
+        </p:txBody>
+      </p:sp>
+    </p:spTree>
+  </p:cSld>
+  <p:clrMapOvr>
+    <a:masterClrMapping/>
+  </p:clrMapOvr>
+</p:sld>
+</file>
+
+<file path=ppt/slides/slide14.xml><?xml version="1.0" encoding="utf-8"?>
+<p:sld xmlns:a="http://schemas.openxmlformats.org/drawingml/2006/main" xmlns:p="http://schemas.openxmlformats.org/presentationml/2006/main" xmlns:r="http://schemas.openxmlformats.org/officeDocument/2006/relationships">
+  <p:cSld>
+    <p:spTree>
+      <p:nvGrpSpPr>
+        <p:cNvPr id="1" name=""/>
+        <p:cNvGrpSpPr/>
+        <p:nvPr/>
+      </p:nvGrpSpPr>
+      <p:grpSpPr/>
+      <p:sp>
+        <p:nvSpPr>
+          <p:cNvPr id="2" name="TextBox 1"/>
+          <p:cNvSpPr txBox="1"/>
+          <p:nvPr/>
+        </p:nvSpPr>
+        <p:spPr>
+          <a:xfrm>
+            <a:off x="457200" y="320040"/>
+            <a:ext cx="8229600" cy="822960"/>
+          </a:xfrm>
+          <a:prstGeom prst="rect">
+            <a:avLst/>
+          </a:prstGeom>
+          <a:noFill/>
+        </p:spPr>
+        <p:txBody>
+          <a:bodyPr wrap="square">
+            <a:spAutoFit/>
+          </a:bodyPr>
+          <a:lstStyle/>
+          <a:p>
+            <a:r>
+              <a:rPr sz="2600" b="1">
+                <a:solidFill>
+                  <a:srgbClr val="0B3D2E"/>
+                </a:solidFill>
+              </a:rPr>
+              <a:t>🔗 Referencias</a:t>
+            </a:r>
+          </a:p>
+        </p:txBody>
+      </p:sp>
+      <p:sp>
+        <p:nvSpPr>
+          <p:cNvPr id="3" name="TextBox 2"/>
+          <p:cNvSpPr txBox="1"/>
+          <p:nvPr/>
+        </p:nvSpPr>
+        <p:spPr>
+          <a:xfrm>
+            <a:off x="457200" y="1280160"/>
+            <a:ext cx="8229600" cy="4937760"/>
+          </a:xfrm>
+          <a:prstGeom prst="rect">
+            <a:avLst/>
+          </a:prstGeom>
+          <a:noFill/>
+        </p:spPr>
+        <p:txBody>
+          <a:bodyPr wrap="square">
+            <a:spAutoFit/>
+          </a:bodyPr>
+          <a:lstStyle/>
+          <a:p>
+            <a:pPr>
+              <a:spcAft>
+                <a:spcPts val="600"/>
+              </a:spcAft>
+            </a:pPr>
+            <a:r>
+              <a:rPr sz="1500">
+                <a:solidFill>
+                  <a:srgbClr val="22282E"/>
+                </a:solidFill>
+              </a:rPr>
               <a:t>•  NIST FIPS 197 (AES) — &lt;https://csrc.nist.gov/publications/detail/fips/197/final&gt;</a:t>
             </a:r>
           </a:p>
@@ -3599,6 +3855,81 @@
           </a:p>
         </p:txBody>
       </p:sp>
+    </p:spTree>
+  </p:cSld>
+  <p:clrMapOvr>
+    <a:masterClrMapping/>
+  </p:clrMapOvr>
+</p:sld>
+</file>
+
+<file path=ppt/slides/slide15.xml><?xml version="1.0" encoding="utf-8"?>
+<p:sld xmlns:a="http://schemas.openxmlformats.org/drawingml/2006/main" xmlns:p="http://schemas.openxmlformats.org/presentationml/2006/main" xmlns:r="http://schemas.openxmlformats.org/officeDocument/2006/relationships">
+  <p:cSld>
+    <p:spTree>
+      <p:nvGrpSpPr>
+        <p:cNvPr id="1" name=""/>
+        <p:cNvGrpSpPr/>
+        <p:nvPr/>
+      </p:nvGrpSpPr>
+      <p:grpSpPr/>
+      <p:sp>
+        <p:nvSpPr>
+          <p:cNvPr id="2" name="TextBox 1"/>
+          <p:cNvSpPr txBox="1"/>
+          <p:nvPr/>
+        </p:nvSpPr>
+        <p:spPr>
+          <a:xfrm>
+            <a:off x="457200" y="274320"/>
+            <a:ext cx="8229600" cy="640080"/>
+          </a:xfrm>
+          <a:prstGeom prst="rect">
+            <a:avLst/>
+          </a:prstGeom>
+          <a:noFill/>
+        </p:spPr>
+        <p:txBody>
+          <a:bodyPr wrap="square">
+            <a:spAutoFit/>
+          </a:bodyPr>
+          <a:lstStyle/>
+          <a:p>
+            <a:r>
+              <a:rPr sz="2200" b="1">
+                <a:solidFill>
+                  <a:srgbClr val="0B3D2E"/>
+                </a:solidFill>
+              </a:rPr>
+              <a:t>Diagrama de la clase</a:t>
+            </a:r>
+          </a:p>
+        </p:txBody>
+      </p:sp>
+      <p:pic>
+        <p:nvPicPr>
+          <p:cNvPr id="3" name="Picture 2" descr="a36fad1dd74a6e4b.png"/>
+          <p:cNvPicPr>
+            <a:picLocks noChangeAspect="1"/>
+          </p:cNvPicPr>
+          <p:nvPr/>
+        </p:nvPicPr>
+        <p:blipFill>
+          <a:blip r:embed="rId2"/>
+          <a:stretch>
+            <a:fillRect/>
+          </a:stretch>
+        </p:blipFill>
+        <p:spPr>
+          <a:xfrm>
+            <a:off x="457200" y="1298448"/>
+            <a:ext cx="8229600" cy="4901184"/>
+          </a:xfrm>
+          <a:prstGeom prst="rect">
+            <a:avLst/>
+          </a:prstGeom>
+        </p:spPr>
+      </p:pic>
     </p:spTree>
   </p:cSld>
   <p:clrMapOvr>
@@ -3683,7 +4014,7 @@
                   <a:srgbClr val="22282E"/>
                 </a:solidFill>
               </a:rPr>
-              <a:t>•  Dominar el cifrado simétrico moderno con AES: entender qué es un cifrado por bloques, cómo funciona AES a alto nivel (SubBytes, ShiftRows, MixColumns, AddRoundKey), y —lo más importante en la práctica— por qué el modo de operación determina la seguridad real. Verás en carne propia por qué ECB filtra estructura y por qué CBC, CTR y GCM se comportan de forma distinta.</a:t>
+              <a:t>•  Dominar el cifrado simétrico moderno con AES: entender qué es un cifrado por bloques, cómo funciona AES a alto nivel (SubBytes, ShiftRows, MixColumns, AddRoundKey), y —lo más importante en la…</a:t>
             </a:r>
           </a:p>
         </p:txBody>
@@ -4077,7 +4408,7 @@
                   <a:srgbClr val="0B3D2E"/>
                 </a:solidFill>
               </a:rPr>
-              <a:t>📖 Definiciones y características</a:t>
+              <a:t>🧠 Explicación en profundidad</a:t>
             </a:r>
           </a:p>
         </p:txBody>
@@ -4115,97 +4446,97 @@
                   <a:srgbClr val="22282E"/>
                 </a:solidFill>
               </a:rPr>
-              <a:t>•  AES (Advanced Encryption Standard): cifrado por bloques de 128 bits con claves de 128/192/256 bits (FIPS 197). Rápido en hardware (AES-NI).</a:t>
-            </a:r>
-          </a:p>
-          <a:p>
-            <a:pPr>
-              <a:spcAft>
-                <a:spcPts val="600"/>
-              </a:spcAft>
-            </a:pPr>
-            <a:r>
-              <a:rPr sz="1500">
-                <a:solidFill>
-                  <a:srgbClr val="22282E"/>
-                </a:solidFill>
-              </a:rPr>
-              <a:t>•  Modo de operación: forma de aplicar un cifrado por bloques a mensajes de tamaño arbitrario. Característica: sin un buen modo, AES es inseguro.</a:t>
-            </a:r>
-          </a:p>
-          <a:p>
-            <a:pPr>
-              <a:spcAft>
-                <a:spcPts val="600"/>
-              </a:spcAft>
-            </a:pPr>
-            <a:r>
-              <a:rPr sz="1500">
-                <a:solidFill>
-                  <a:srgbClr val="22282E"/>
-                </a:solidFill>
-              </a:rPr>
-              <a:t>•  IV (vector de inicialización): valor aleatorio que aleatoriza el cifrado en CBC/CTR. Nunca debe repetirse con la misma clave.</a:t>
-            </a:r>
-          </a:p>
-          <a:p>
-            <a:pPr>
-              <a:spcAft>
-                <a:spcPts val="600"/>
-              </a:spcAft>
-            </a:pPr>
-            <a:r>
-              <a:rPr sz="1500">
-                <a:solidFill>
-                  <a:srgbClr val="22282E"/>
-                </a:solidFill>
-              </a:rPr>
-              <a:t>•  ECB (Electronic Codebook): cifra cada bloque independientemente. Bloques iguales → cifrados iguales. Nunca usar.</a:t>
-            </a:r>
-          </a:p>
-          <a:p>
-            <a:pPr>
-              <a:spcAft>
-                <a:spcPts val="600"/>
-              </a:spcAft>
-            </a:pPr>
-            <a:r>
-              <a:rPr sz="1500">
-                <a:solidFill>
-                  <a:srgbClr val="22282E"/>
-                </a:solidFill>
-              </a:rPr>
-              <a:t>•  CBC (Cipher Block Chaining): encadena bloques con XOR del cifrado anterior; requiere IV aleatorio e impredecible.</a:t>
-            </a:r>
-          </a:p>
-          <a:p>
-            <a:pPr>
-              <a:spcAft>
-                <a:spcPts val="600"/>
-              </a:spcAft>
-            </a:pPr>
-            <a:r>
-              <a:rPr sz="1500">
-                <a:solidFill>
-                  <a:srgbClr val="22282E"/>
-                </a:solidFill>
-              </a:rPr>
-              <a:t>•  CTR (Counter): cifra un contador y hace XOR con el texto; convierte AES en cifrado de flujo, paralelizable.</a:t>
-            </a:r>
-          </a:p>
-          <a:p>
-            <a:pPr>
-              <a:spcAft>
-                <a:spcPts val="600"/>
-              </a:spcAft>
-            </a:pPr>
-            <a:r>
-              <a:rPr sz="1500">
-                <a:solidFill>
-                  <a:srgbClr val="22282E"/>
-                </a:solidFill>
-              </a:rPr>
-              <a:t>•  Padding PKCS#7: relleno para completar el último bloque; su verificación insegura habilita padding oracle.</a:t>
+              <a:t>•  Conviene separar dos cosas que se confunden constantemente. AES es una primitiva de</a:t>
+            </a:r>
+          </a:p>
+          <a:p>
+            <a:pPr>
+              <a:spcAft>
+                <a:spcPts val="600"/>
+              </a:spcAft>
+            </a:pPr>
+            <a:r>
+              <a:rPr sz="1500">
+                <a:solidFill>
+                  <a:srgbClr val="22282E"/>
+                </a:solidFill>
+              </a:rPr>
+              <a:t>•  bloque: una permutación que, dada una clave, transforma exactamente 128 bits en otros</a:t>
+            </a:r>
+          </a:p>
+          <a:p>
+            <a:pPr>
+              <a:spcAft>
+                <a:spcPts val="600"/>
+              </a:spcAft>
+            </a:pPr>
+            <a:r>
+              <a:rPr sz="1500">
+                <a:solidFill>
+                  <a:srgbClr val="22282E"/>
+                </a:solidFill>
+              </a:rPr>
+              <a:t>•  128 bits. Eso es todo lo que hace. Internamente aplica 10, 12 o 14 rondas (según la clave</a:t>
+            </a:r>
+          </a:p>
+          <a:p>
+            <a:pPr>
+              <a:spcAft>
+                <a:spcPts val="600"/>
+              </a:spcAft>
+            </a:pPr>
+            <a:r>
+              <a:rPr sz="1500">
+                <a:solidFill>
+                  <a:srgbClr val="22282E"/>
+                </a:solidFill>
+              </a:rPr>
+              <a:t>•  sea de 128, 192 o 256 bits) de cuatro operaciones —SubBytes con su S-box no lineal,</a:t>
+            </a:r>
+          </a:p>
+          <a:p>
+            <a:pPr>
+              <a:spcAft>
+                <a:spcPts val="600"/>
+              </a:spcAft>
+            </a:pPr>
+            <a:r>
+              <a:rPr sz="1500">
+                <a:solidFill>
+                  <a:srgbClr val="22282E"/>
+                </a:solidFill>
+              </a:rPr>
+              <a:t>•  ShiftRows, MixColumns y AddRoundKey— diseñadas para producir confusión (romper</a:t>
+            </a:r>
+          </a:p>
+          <a:p>
+            <a:pPr>
+              <a:spcAft>
+                <a:spcPts val="600"/>
+              </a:spcAft>
+            </a:pPr>
+            <a:r>
+              <a:rPr sz="1500">
+                <a:solidFill>
+                  <a:srgbClr val="22282E"/>
+                </a:solidFill>
+              </a:rPr>
+              <a:t>•  la relación entre clave y cifrado) y difusión (que cambiar un bit de entrada afecte a</a:t>
+            </a:r>
+          </a:p>
+          <a:p>
+            <a:pPr>
+              <a:spcAft>
+                <a:spcPts val="600"/>
+              </a:spcAft>
+            </a:pPr>
+            <a:r>
+              <a:rPr sz="1500">
+                <a:solidFill>
+                  <a:srgbClr val="22282E"/>
+                </a:solidFill>
+              </a:rPr>
+              <a:t>•  todo el bloque). AES lleva más de dos décadas de criptoanálisis público sin una rotura</a:t>
             </a:r>
           </a:p>
         </p:txBody>
@@ -4256,7 +4587,7 @@
                   <a:srgbClr val="0B3D2E"/>
                 </a:solidFill>
               </a:rPr>
-              <a:t>🧰 Herramientas y preparación</a:t>
+              <a:t>📖 Definiciones y características</a:t>
             </a:r>
           </a:p>
         </p:txBody>
@@ -4294,37 +4625,97 @@
                   <a:srgbClr val="22282E"/>
                 </a:solidFill>
               </a:rPr>
-              <a:t>•  openssl version</a:t>
-            </a:r>
-          </a:p>
-          <a:p>
-            <a:pPr>
-              <a:spcAft>
-                <a:spcPts val="600"/>
-              </a:spcAft>
-            </a:pPr>
-            <a:r>
-              <a:rPr sz="1500">
-                <a:solidFill>
-                  <a:srgbClr val="22282E"/>
-                </a:solidFill>
-              </a:rPr>
-              <a:t>•  pip install cryptography pillow</a:t>
-            </a:r>
-          </a:p>
-          <a:p>
-            <a:pPr>
-              <a:spcAft>
-                <a:spcPts val="600"/>
-              </a:spcAft>
-            </a:pPr>
-            <a:r>
-              <a:rPr sz="1500">
-                <a:solidFill>
-                  <a:srgbClr val="22282E"/>
-                </a:solidFill>
-              </a:rPr>
-              <a:t>•  Trabaja siempre en tu propia máquina de laboratorio; el objetivo es entender, no atacar sistemas ajenos.</a:t>
+              <a:t>•  AES (Advanced Encryption Standard): cifrado por bloques de 128 bits con claves de 128/192/256 bits (FIPS 197). Rápido en hardware (AES-NI).</a:t>
+            </a:r>
+          </a:p>
+          <a:p>
+            <a:pPr>
+              <a:spcAft>
+                <a:spcPts val="600"/>
+              </a:spcAft>
+            </a:pPr>
+            <a:r>
+              <a:rPr sz="1500">
+                <a:solidFill>
+                  <a:srgbClr val="22282E"/>
+                </a:solidFill>
+              </a:rPr>
+              <a:t>•  Modo de operación: forma de aplicar un cifrado por bloques a mensajes de tamaño arbitrario. Característica: sin un buen modo, AES es inseguro.</a:t>
+            </a:r>
+          </a:p>
+          <a:p>
+            <a:pPr>
+              <a:spcAft>
+                <a:spcPts val="600"/>
+              </a:spcAft>
+            </a:pPr>
+            <a:r>
+              <a:rPr sz="1500">
+                <a:solidFill>
+                  <a:srgbClr val="22282E"/>
+                </a:solidFill>
+              </a:rPr>
+              <a:t>•  IV (vector de inicialización): valor aleatorio que aleatoriza el cifrado en CBC/CTR. Nunca debe repetirse con la misma clave.</a:t>
+            </a:r>
+          </a:p>
+          <a:p>
+            <a:pPr>
+              <a:spcAft>
+                <a:spcPts val="600"/>
+              </a:spcAft>
+            </a:pPr>
+            <a:r>
+              <a:rPr sz="1500">
+                <a:solidFill>
+                  <a:srgbClr val="22282E"/>
+                </a:solidFill>
+              </a:rPr>
+              <a:t>•  ECB (Electronic Codebook): cifra cada bloque independientemente. Bloques iguales → cifrados iguales. Nunca usar.</a:t>
+            </a:r>
+          </a:p>
+          <a:p>
+            <a:pPr>
+              <a:spcAft>
+                <a:spcPts val="600"/>
+              </a:spcAft>
+            </a:pPr>
+            <a:r>
+              <a:rPr sz="1500">
+                <a:solidFill>
+                  <a:srgbClr val="22282E"/>
+                </a:solidFill>
+              </a:rPr>
+              <a:t>•  CBC (Cipher Block Chaining): encadena bloques con XOR del cifrado anterior; requiere IV aleatorio e impredecible.</a:t>
+            </a:r>
+          </a:p>
+          <a:p>
+            <a:pPr>
+              <a:spcAft>
+                <a:spcPts val="600"/>
+              </a:spcAft>
+            </a:pPr>
+            <a:r>
+              <a:rPr sz="1500">
+                <a:solidFill>
+                  <a:srgbClr val="22282E"/>
+                </a:solidFill>
+              </a:rPr>
+              <a:t>•  CTR (Counter): cifra un contador y hace XOR con el texto; convierte AES en cifrado de flujo, paralelizable.</a:t>
+            </a:r>
+          </a:p>
+          <a:p>
+            <a:pPr>
+              <a:spcAft>
+                <a:spcPts val="600"/>
+              </a:spcAft>
+            </a:pPr>
+            <a:r>
+              <a:rPr sz="1500">
+                <a:solidFill>
+                  <a:srgbClr val="22282E"/>
+                </a:solidFill>
+              </a:rPr>
+              <a:t>•  Padding PKCS#7: relleno para completar el último bloque; su verificación insegura habilita padding oracle.</a:t>
             </a:r>
           </a:p>
         </p:txBody>
@@ -4375,7 +4766,7 @@
                   <a:srgbClr val="0B3D2E"/>
                 </a:solidFill>
               </a:rPr>
-              <a:t>🧪 Laboratorio guiado</a:t>
+              <a:t>📔 Glosario</a:t>
             </a:r>
           </a:p>
         </p:txBody>
@@ -4413,97 +4804,97 @@
                   <a:srgbClr val="22282E"/>
                 </a:solidFill>
               </a:rPr>
-              <a:t>•  Cifra un archivo con ECB y CBC en OpenSSL y compara:</a:t>
-            </a:r>
-          </a:p>
-          <a:p>
-            <a:pPr>
-              <a:spcAft>
-                <a:spcPts val="600"/>
-              </a:spcAft>
-            </a:pPr>
-            <a:r>
-              <a:rPr sz="1500">
-                <a:solidFill>
-                  <a:srgbClr val="22282E"/>
-                </a:solidFill>
-              </a:rPr>
-              <a:t>•  openssl enc -aes-128-ecb -in mensaje.txt -out ecb.bin -K 00112233445566778899aabbccddeeff -nosalt</a:t>
-            </a:r>
-          </a:p>
-          <a:p>
-            <a:pPr>
-              <a:spcAft>
-                <a:spcPts val="600"/>
-              </a:spcAft>
-            </a:pPr>
-            <a:r>
-              <a:rPr sz="1500">
-                <a:solidFill>
-                  <a:srgbClr val="22282E"/>
-                </a:solidFill>
-              </a:rPr>
-              <a:t>•  openssl enc -aes-128-cbc -in mensaje.txt -out cbc.bin \</a:t>
-            </a:r>
-          </a:p>
-          <a:p>
-            <a:pPr>
-              <a:spcAft>
-                <a:spcPts val="600"/>
-              </a:spcAft>
-            </a:pPr>
-            <a:r>
-              <a:rPr sz="1500">
-                <a:solidFill>
-                  <a:srgbClr val="22282E"/>
-                </a:solidFill>
-              </a:rPr>
-              <a:t>•  -K 00112233445566778899aabbccddeeff -iv 0102030405060708090a0b0c0d0e0f10</a:t>
-            </a:r>
-          </a:p>
-          <a:p>
-            <a:pPr>
-              <a:spcAft>
-                <a:spcPts val="600"/>
-              </a:spcAft>
-            </a:pPr>
-            <a:r>
-              <a:rPr sz="1500">
-                <a:solidFill>
-                  <a:srgbClr val="22282E"/>
-                </a:solidFill>
-              </a:rPr>
-              <a:t>•  Fuga visual de ECB. Convierte una imagen a formato crudo, cífrala con ECB y vuelve a interpretarla como imagen: el patrón original (el famoso pingüino Tux) sigue visible. Repite con CBC y observa el ruido uniforme.</a:t>
-            </a:r>
-          </a:p>
-          <a:p>
-            <a:pPr>
-              <a:spcAft>
-                <a:spcPts val="600"/>
-              </a:spcAft>
-            </a:pPr>
-            <a:r>
-              <a:rPr sz="1500">
-                <a:solidFill>
-                  <a:srgbClr val="22282E"/>
-                </a:solidFill>
-              </a:rPr>
-              <a:t>•  AES-CBC en Python con IV aleatorio:</a:t>
-            </a:r>
-          </a:p>
-          <a:p>
-            <a:pPr>
-              <a:spcAft>
-                <a:spcPts val="600"/>
-              </a:spcAft>
-            </a:pPr>
-            <a:r>
-              <a:rPr sz="1500">
-                <a:solidFill>
-                  <a:srgbClr val="22282E"/>
-                </a:solidFill>
-              </a:rPr>
-              <a:t>•  import os</a:t>
+              <a:t>•  Término — Definición concisa</a:t>
+            </a:r>
+          </a:p>
+          <a:p>
+            <a:pPr>
+              <a:spcAft>
+                <a:spcPts val="600"/>
+              </a:spcAft>
+            </a:pPr>
+            <a:r>
+              <a:rPr sz="1500">
+                <a:solidFill>
+                  <a:srgbClr val="22282E"/>
+                </a:solidFill>
+              </a:rPr>
+              <a:t>•  Cifrado por bloques — Primitiva que transforma bloques de tamaño fijo (AES: 128 bits)</a:t>
+            </a:r>
+          </a:p>
+          <a:p>
+            <a:pPr>
+              <a:spcAft>
+                <a:spcPts val="600"/>
+              </a:spcAft>
+            </a:pPr>
+            <a:r>
+              <a:rPr sz="1500">
+                <a:solidFill>
+                  <a:srgbClr val="22282E"/>
+                </a:solidFill>
+              </a:rPr>
+              <a:t>•  AES — Advanced Encryption Standard; claves de 128, 192 o 256 bits</a:t>
+            </a:r>
+          </a:p>
+          <a:p>
+            <a:pPr>
+              <a:spcAft>
+                <a:spcPts val="600"/>
+              </a:spcAft>
+            </a:pPr>
+            <a:r>
+              <a:rPr sz="1500">
+                <a:solidFill>
+                  <a:srgbClr val="22282E"/>
+                </a:solidFill>
+              </a:rPr>
+              <a:t>•  Ronda — Repetición de las operaciones internas de AES (10, 12 o 14)</a:t>
+            </a:r>
+          </a:p>
+          <a:p>
+            <a:pPr>
+              <a:spcAft>
+                <a:spcPts val="600"/>
+              </a:spcAft>
+            </a:pPr>
+            <a:r>
+              <a:rPr sz="1500">
+                <a:solidFill>
+                  <a:srgbClr val="22282E"/>
+                </a:solidFill>
+              </a:rPr>
+              <a:t>•  S-box — Tabla de sustitución no lineal; aporta confusión</a:t>
+            </a:r>
+          </a:p>
+          <a:p>
+            <a:pPr>
+              <a:spcAft>
+                <a:spcPts val="600"/>
+              </a:spcAft>
+            </a:pPr>
+            <a:r>
+              <a:rPr sz="1500">
+                <a:solidFill>
+                  <a:srgbClr val="22282E"/>
+                </a:solidFill>
+              </a:rPr>
+              <a:t>•  Confusión / difusión — Ocultar la relación con la clave / propagar cada bit de entrada</a:t>
+            </a:r>
+          </a:p>
+          <a:p>
+            <a:pPr>
+              <a:spcAft>
+                <a:spcPts val="600"/>
+              </a:spcAft>
+            </a:pPr>
+            <a:r>
+              <a:rPr sz="1500">
+                <a:solidFill>
+                  <a:srgbClr val="22282E"/>
+                </a:solidFill>
+              </a:rPr>
+              <a:t>•  AES-NI — Instrucciones de CPU que implementan AES en hardware</a:t>
             </a:r>
           </a:p>
         </p:txBody>
@@ -4554,7 +4945,7 @@
                   <a:srgbClr val="0B3D2E"/>
                 </a:solidFill>
               </a:rPr>
-              <a:t>✍️ Ejercicios</a:t>
+              <a:t>🧰 Herramientas y preparación</a:t>
             </a:r>
           </a:p>
         </p:txBody>
@@ -4592,82 +4983,7 @@
                   <a:srgbClr val="22282E"/>
                 </a:solidFill>
               </a:rPr>
-              <a:t>•  Explica por qué ECB revela si dos bloques de texto plano son iguales.</a:t>
-            </a:r>
-          </a:p>
-          <a:p>
-            <a:pPr>
-              <a:spcAft>
-                <a:spcPts val="600"/>
-              </a:spcAft>
-            </a:pPr>
-            <a:r>
-              <a:rPr sz="1500">
-                <a:solidFill>
-                  <a:srgbClr val="22282E"/>
-                </a:solidFill>
-              </a:rPr>
-              <a:t>•  ¿Qué ocurre si reutilizas el mismo IV en CBC para dos mensajes distintos?</a:t>
-            </a:r>
-          </a:p>
-          <a:p>
-            <a:pPr>
-              <a:spcAft>
-                <a:spcPts val="600"/>
-              </a:spcAft>
-            </a:pPr>
-            <a:r>
-              <a:rPr sz="1500">
-                <a:solidFill>
-                  <a:srgbClr val="22282E"/>
-                </a:solidFill>
-              </a:rPr>
-              <a:t>•  Implementa cifrado/descifrado AES-CTR y comprueba que E(k)⊕E(k)=texto.</a:t>
-            </a:r>
-          </a:p>
-          <a:p>
-            <a:pPr>
-              <a:spcAft>
-                <a:spcPts val="600"/>
-              </a:spcAft>
-            </a:pPr>
-            <a:r>
-              <a:rPr sz="1500">
-                <a:solidFill>
-                  <a:srgbClr val="22282E"/>
-                </a:solidFill>
-              </a:rPr>
-              <a:t>•  Mide con openssl speed aes-128-cbc el rendimiento con y sin AES-NI.</a:t>
-            </a:r>
-          </a:p>
-          <a:p>
-            <a:pPr>
-              <a:spcAft>
-                <a:spcPts val="600"/>
-              </a:spcAft>
-            </a:pPr>
-            <a:r>
-              <a:rPr sz="1500">
-                <a:solidFill>
-                  <a:srgbClr val="22282E"/>
-                </a:solidFill>
-              </a:rPr>
-              <a:t>•  Convierte una imagen BMP a ECB y documenta la fuga con capturas.</a:t>
-            </a:r>
-          </a:p>
-          <a:p>
-            <a:pPr>
-              <a:spcAft>
-                <a:spcPts val="600"/>
-              </a:spcAft>
-            </a:pPr>
-            <a:r>
-              <a:rPr sz="1500">
-                <a:solidFill>
-                  <a:srgbClr val="22282E"/>
-                </a:solidFill>
-              </a:rPr>
-              <a:t>•  Argumenta por qué CTR permite acceso aleatorio a bloques y CBC no.</a:t>
+              <a:t>•  Trabaja siempre en tu propia máquina de laboratorio; el objetivo es entender, no atacar sistemas ajenos.</a:t>
             </a:r>
           </a:p>
         </p:txBody>
@@ -4718,7 +5034,7 @@
                   <a:srgbClr val="0B3D2E"/>
                 </a:solidFill>
               </a:rPr>
-              <a:t>📝 Reto verificable</a:t>
+              <a:t>🧪 Laboratorio guiado</a:t>
             </a:r>
           </a:p>
         </p:txBody>
@@ -4756,7 +5072,67 @@
                   <a:srgbClr val="22282E"/>
                 </a:solidFill>
               </a:rPr>
-              <a:t>•  Escribe un script que cifre la misma imagen BMP con ECB y con CBC y genere las dos salidas visualizables. Criterio de aceptación: la versión ECB muestra claramente la silueta original y la CBC es indistinguible de ruido; documenta ambas con la explicación de por qué ocurre.</a:t>
+              <a:t>•  Cifra un archivo con ECB y CBC en OpenSSL y compara:</a:t>
+            </a:r>
+          </a:p>
+          <a:p>
+            <a:pPr>
+              <a:spcAft>
+                <a:spcPts val="600"/>
+              </a:spcAft>
+            </a:pPr>
+            <a:r>
+              <a:rPr sz="1500">
+                <a:solidFill>
+                  <a:srgbClr val="22282E"/>
+                </a:solidFill>
+              </a:rPr>
+              <a:t>•  Fuga visual de ECB. Convierte una imagen a formato crudo, cífrala con ECB y vuelve a interpretarla como imagen: el patrón original (el famoso pingüino Tux) sigue visible. Repite con CBC y observa el…</a:t>
+            </a:r>
+          </a:p>
+          <a:p>
+            <a:pPr>
+              <a:spcAft>
+                <a:spcPts val="600"/>
+              </a:spcAft>
+            </a:pPr>
+            <a:r>
+              <a:rPr sz="1500">
+                <a:solidFill>
+                  <a:srgbClr val="22282E"/>
+                </a:solidFill>
+              </a:rPr>
+              <a:t>•  AES-CBC en Python con IV aleatorio:</a:t>
+            </a:r>
+          </a:p>
+          <a:p>
+            <a:pPr>
+              <a:spcAft>
+                <a:spcPts val="600"/>
+              </a:spcAft>
+            </a:pPr>
+            <a:r>
+              <a:rPr sz="1500">
+                <a:solidFill>
+                  <a:srgbClr val="22282E"/>
+                </a:solidFill>
+              </a:rPr>
+              <a:t>•  AES-CTR. Repite con modes.CTR(nonce) y verifica que no necesita padding.</a:t>
+            </a:r>
+          </a:p>
+          <a:p>
+            <a:pPr>
+              <a:spcAft>
+                <a:spcPts val="600"/>
+              </a:spcAft>
+            </a:pPr>
+            <a:r>
+              <a:rPr sz="1500">
+                <a:solidFill>
+                  <a:srgbClr val="22282E"/>
+                </a:solidFill>
+              </a:rPr>
+              <a:t>•  Reflexión sobre integridad. Modifica un byte del texto cifrado CBC y descífralo: obtienes basura pero no hay error. Concluye que CBC no protege integridad → necesitas GCM.</a:t>
             </a:r>
           </a:p>
         </p:txBody>
